--- a/ws02/class/ws02_slide_class4.pptx
+++ b/ws02/class/ws02_slide_class4.pptx
@@ -266,7 +266,7 @@
 </file>
 
 <file path=ppt/notesSlides/notesSlide1.xml><?xml version="1.0" encoding="utf-8"?>
-<p:notes xmlns:a="http://schemas.openxmlformats.org/drawingml/2006/main" xmlns:r="http://schemas.openxmlformats.org/officeDocument/2006/relationships" xmlns:p="http://schemas.openxmlformats.org/presentationml/2006/main" showMasterSp="0" showMasterPhAnim="0">
+<p:notes xmlns:a="http://schemas.openxmlformats.org/drawingml/2006/main" xmlns:p="http://schemas.openxmlformats.org/presentationml/2006/main" showMasterSp="0" showMasterPhAnim="0">
   <p:cSld>
     <p:spTree>
       <p:nvGrpSpPr>
@@ -369,20 +369,7 @@
           </a:bodyPr>
           <a:lstStyle/>
           <a:p>
-            <a:pPr marL="0" lvl="0" indent="0" algn="l" rtl="0">
-              <a:lnSpc>
-                <a:spcPct val="100000"/>
-              </a:lnSpc>
-              <a:spcBef>
-                <a:spcPts val="0"/>
-              </a:spcBef>
-              <a:spcAft>
-                <a:spcPts val="0"/>
-              </a:spcAft>
-              <a:buSzPts val="1100"/>
-              <a:buNone/>
-            </a:pPr>
-            <a:endParaRPr/>
+            <a:endParaRPr dirty="0"/>
           </a:p>
         </p:txBody>
       </p:sp>
@@ -395,7 +382,7 @@
 </file>
 
 <file path=ppt/notesSlides/notesSlide10.xml><?xml version="1.0" encoding="utf-8"?>
-<p:notes xmlns:a="http://schemas.openxmlformats.org/drawingml/2006/main" xmlns:r="http://schemas.openxmlformats.org/officeDocument/2006/relationships" xmlns:p="http://schemas.openxmlformats.org/presentationml/2006/main">
+<p:notes xmlns:a="http://schemas.openxmlformats.org/drawingml/2006/main" xmlns:ns2="http://schemas.microsoft.com/office/powerpoint/2010/main" xmlns:p="http://schemas.openxmlformats.org/presentationml/2006/main">
   <p:cSld>
     <p:spTree>
       <p:nvGrpSpPr>
@@ -438,7 +425,7 @@
           <a:bodyPr/>
           <a:lstStyle/>
           <a:p>
-            <a:endParaRPr lang="en-US" dirty="0"/>
+            <a:endParaRPr dirty="0"/>
           </a:p>
         </p:txBody>
       </p:sp>
@@ -468,7 +455,7 @@
     </p:spTree>
     <p:extLst>
       <p:ext uri="{BB962C8B-B14F-4D97-AF65-F5344CB8AC3E}">
-        <p14:creationId xmlns:p14="http://schemas.microsoft.com/office/powerpoint/2010/main" val="1024086991"/>
+        <ns2:creationId val="1024086991"/>
       </p:ext>
     </p:extLst>
   </p:cSld>
@@ -479,7 +466,7 @@
 </file>
 
 <file path=ppt/notesSlides/notesSlide11.xml><?xml version="1.0" encoding="utf-8"?>
-<p:notes xmlns:a="http://schemas.openxmlformats.org/drawingml/2006/main" xmlns:r="http://schemas.openxmlformats.org/officeDocument/2006/relationships" xmlns:p="http://schemas.openxmlformats.org/presentationml/2006/main">
+<p:notes xmlns:a="http://schemas.openxmlformats.org/drawingml/2006/main" xmlns:ns2="http://schemas.microsoft.com/office/powerpoint/2010/main" xmlns:p="http://schemas.openxmlformats.org/presentationml/2006/main">
   <p:cSld>
     <p:spTree>
       <p:nvGrpSpPr>
@@ -522,7 +509,7 @@
           <a:bodyPr/>
           <a:lstStyle/>
           <a:p>
-            <a:endParaRPr lang="en-US" dirty="0"/>
+            <a:endParaRPr dirty="0"/>
           </a:p>
         </p:txBody>
       </p:sp>
@@ -552,7 +539,7 @@
     </p:spTree>
     <p:extLst>
       <p:ext uri="{BB962C8B-B14F-4D97-AF65-F5344CB8AC3E}">
-        <p14:creationId xmlns:p14="http://schemas.microsoft.com/office/powerpoint/2010/main" val="1024086991"/>
+        <ns2:creationId val="1024086991"/>
       </p:ext>
     </p:extLst>
   </p:cSld>
@@ -563,7 +550,7 @@
 </file>
 
 <file path=ppt/notesSlides/notesSlide12.xml><?xml version="1.0" encoding="utf-8"?>
-<p:notes xmlns:a="http://schemas.openxmlformats.org/drawingml/2006/main" xmlns:r="http://schemas.openxmlformats.org/officeDocument/2006/relationships" xmlns:p="http://schemas.openxmlformats.org/presentationml/2006/main">
+<p:notes xmlns:a="http://schemas.openxmlformats.org/drawingml/2006/main" xmlns:ns2="http://schemas.microsoft.com/office/powerpoint/2010/main" xmlns:p="http://schemas.openxmlformats.org/presentationml/2006/main">
   <p:cSld>
     <p:spTree>
       <p:nvGrpSpPr>
@@ -606,7 +593,7 @@
           <a:bodyPr/>
           <a:lstStyle/>
           <a:p>
-            <a:endParaRPr lang="en-US" dirty="0"/>
+            <a:endParaRPr dirty="0"/>
           </a:p>
         </p:txBody>
       </p:sp>
@@ -636,7 +623,7 @@
     </p:spTree>
     <p:extLst>
       <p:ext uri="{BB962C8B-B14F-4D97-AF65-F5344CB8AC3E}">
-        <p14:creationId xmlns:p14="http://schemas.microsoft.com/office/powerpoint/2010/main" val="1024086991"/>
+        <ns2:creationId val="1024086991"/>
       </p:ext>
     </p:extLst>
   </p:cSld>
@@ -647,7 +634,7 @@
 </file>
 
 <file path=ppt/notesSlides/notesSlide13.xml><?xml version="1.0" encoding="utf-8"?>
-<p:notes xmlns:a="http://schemas.openxmlformats.org/drawingml/2006/main" xmlns:r="http://schemas.openxmlformats.org/officeDocument/2006/relationships" xmlns:p="http://schemas.openxmlformats.org/presentationml/2006/main">
+<p:notes xmlns:a="http://schemas.openxmlformats.org/drawingml/2006/main" xmlns:ns2="http://schemas.microsoft.com/office/powerpoint/2010/main" xmlns:p="http://schemas.openxmlformats.org/presentationml/2006/main">
   <p:cSld>
     <p:spTree>
       <p:nvGrpSpPr>
@@ -690,7 +677,7 @@
           <a:bodyPr/>
           <a:lstStyle/>
           <a:p>
-            <a:endParaRPr lang="en-US" dirty="0"/>
+            <a:endParaRPr dirty="0"/>
           </a:p>
         </p:txBody>
       </p:sp>
@@ -720,7 +707,7 @@
     </p:spTree>
     <p:extLst>
       <p:ext uri="{BB962C8B-B14F-4D97-AF65-F5344CB8AC3E}">
-        <p14:creationId xmlns:p14="http://schemas.microsoft.com/office/powerpoint/2010/main" val="1024086991"/>
+        <ns2:creationId val="1024086991"/>
       </p:ext>
     </p:extLst>
   </p:cSld>
@@ -731,7 +718,7 @@
 </file>
 
 <file path=ppt/notesSlides/notesSlide14.xml><?xml version="1.0" encoding="utf-8"?>
-<p:notes xmlns:a="http://schemas.openxmlformats.org/drawingml/2006/main" xmlns:r="http://schemas.openxmlformats.org/officeDocument/2006/relationships" xmlns:p="http://schemas.openxmlformats.org/presentationml/2006/main">
+<p:notes xmlns:a="http://schemas.openxmlformats.org/drawingml/2006/main" xmlns:ns2="http://schemas.microsoft.com/office/powerpoint/2010/main" xmlns:p="http://schemas.openxmlformats.org/presentationml/2006/main">
   <p:cSld>
     <p:spTree>
       <p:nvGrpSpPr>
@@ -774,7 +761,7 @@
           <a:bodyPr/>
           <a:lstStyle/>
           <a:p>
-            <a:endParaRPr lang="en-US" dirty="0"/>
+            <a:endParaRPr dirty="0"/>
           </a:p>
         </p:txBody>
       </p:sp>
@@ -804,7 +791,7 @@
     </p:spTree>
     <p:extLst>
       <p:ext uri="{BB962C8B-B14F-4D97-AF65-F5344CB8AC3E}">
-        <p14:creationId xmlns:p14="http://schemas.microsoft.com/office/powerpoint/2010/main" val="1024086991"/>
+        <ns2:creationId val="1024086991"/>
       </p:ext>
     </p:extLst>
   </p:cSld>
@@ -815,7 +802,7 @@
 </file>
 
 <file path=ppt/notesSlides/notesSlide15.xml><?xml version="1.0" encoding="utf-8"?>
-<p:notes xmlns:a="http://schemas.openxmlformats.org/drawingml/2006/main" xmlns:r="http://schemas.openxmlformats.org/officeDocument/2006/relationships" xmlns:p="http://schemas.openxmlformats.org/presentationml/2006/main">
+<p:notes xmlns:a="http://schemas.openxmlformats.org/drawingml/2006/main" xmlns:ns2="http://schemas.microsoft.com/office/powerpoint/2010/main" xmlns:p="http://schemas.openxmlformats.org/presentationml/2006/main">
   <p:cSld>
     <p:spTree>
       <p:nvGrpSpPr>
@@ -858,7 +845,7 @@
           <a:bodyPr/>
           <a:lstStyle/>
           <a:p>
-            <a:endParaRPr lang="en-US" dirty="0"/>
+            <a:endParaRPr dirty="0"/>
           </a:p>
         </p:txBody>
       </p:sp>
@@ -888,7 +875,7 @@
     </p:spTree>
     <p:extLst>
       <p:ext uri="{BB962C8B-B14F-4D97-AF65-F5344CB8AC3E}">
-        <p14:creationId xmlns:p14="http://schemas.microsoft.com/office/powerpoint/2010/main" val="1024086991"/>
+        <ns2:creationId val="1024086991"/>
       </p:ext>
     </p:extLst>
   </p:cSld>
@@ -899,7 +886,7 @@
 </file>
 
 <file path=ppt/notesSlides/notesSlide16.xml><?xml version="1.0" encoding="utf-8"?>
-<p:notes xmlns:a="http://schemas.openxmlformats.org/drawingml/2006/main" xmlns:r="http://schemas.openxmlformats.org/officeDocument/2006/relationships" xmlns:p="http://schemas.openxmlformats.org/presentationml/2006/main">
+<p:notes xmlns:a="http://schemas.openxmlformats.org/drawingml/2006/main" xmlns:ns2="http://schemas.microsoft.com/office/powerpoint/2010/main" xmlns:p="http://schemas.openxmlformats.org/presentationml/2006/main">
   <p:cSld>
     <p:spTree>
       <p:nvGrpSpPr>
@@ -942,7 +929,7 @@
           <a:bodyPr/>
           <a:lstStyle/>
           <a:p>
-            <a:endParaRPr lang="en-US" dirty="0"/>
+            <a:endParaRPr dirty="0"/>
           </a:p>
         </p:txBody>
       </p:sp>
@@ -972,7 +959,7 @@
     </p:spTree>
     <p:extLst>
       <p:ext uri="{BB962C8B-B14F-4D97-AF65-F5344CB8AC3E}">
-        <p14:creationId xmlns:p14="http://schemas.microsoft.com/office/powerpoint/2010/main" val="1024086991"/>
+        <ns2:creationId val="1024086991"/>
       </p:ext>
     </p:extLst>
   </p:cSld>
@@ -983,7 +970,7 @@
 </file>
 
 <file path=ppt/notesSlides/notesSlide17.xml><?xml version="1.0" encoding="utf-8"?>
-<p:notes xmlns:a="http://schemas.openxmlformats.org/drawingml/2006/main" xmlns:r="http://schemas.openxmlformats.org/officeDocument/2006/relationships" xmlns:p="http://schemas.openxmlformats.org/presentationml/2006/main">
+<p:notes xmlns:a="http://schemas.openxmlformats.org/drawingml/2006/main" xmlns:ns2="http://schemas.microsoft.com/office/powerpoint/2010/main" xmlns:p="http://schemas.openxmlformats.org/presentationml/2006/main">
   <p:cSld>
     <p:spTree>
       <p:nvGrpSpPr>
@@ -1026,7 +1013,7 @@
           <a:bodyPr/>
           <a:lstStyle/>
           <a:p>
-            <a:endParaRPr lang="en-US" dirty="0"/>
+            <a:endParaRPr dirty="0"/>
           </a:p>
         </p:txBody>
       </p:sp>
@@ -1056,7 +1043,7 @@
     </p:spTree>
     <p:extLst>
       <p:ext uri="{BB962C8B-B14F-4D97-AF65-F5344CB8AC3E}">
-        <p14:creationId xmlns:p14="http://schemas.microsoft.com/office/powerpoint/2010/main" val="1024086991"/>
+        <ns2:creationId val="1024086991"/>
       </p:ext>
     </p:extLst>
   </p:cSld>
@@ -1067,7 +1054,7 @@
 </file>
 
 <file path=ppt/notesSlides/notesSlide18.xml><?xml version="1.0" encoding="utf-8"?>
-<p:notes xmlns:a="http://schemas.openxmlformats.org/drawingml/2006/main" xmlns:r="http://schemas.openxmlformats.org/officeDocument/2006/relationships" xmlns:p="http://schemas.openxmlformats.org/presentationml/2006/main">
+<p:notes xmlns:a="http://schemas.openxmlformats.org/drawingml/2006/main" xmlns:ns2="http://schemas.microsoft.com/office/powerpoint/2010/main" xmlns:p="http://schemas.openxmlformats.org/presentationml/2006/main">
   <p:cSld>
     <p:spTree>
       <p:nvGrpSpPr>
@@ -1110,7 +1097,7 @@
           <a:bodyPr/>
           <a:lstStyle/>
           <a:p>
-            <a:endParaRPr lang="en-US" dirty="0"/>
+            <a:endParaRPr dirty="0"/>
           </a:p>
         </p:txBody>
       </p:sp>
@@ -1140,7 +1127,7 @@
     </p:spTree>
     <p:extLst>
       <p:ext uri="{BB962C8B-B14F-4D97-AF65-F5344CB8AC3E}">
-        <p14:creationId xmlns:p14="http://schemas.microsoft.com/office/powerpoint/2010/main" val="1024086991"/>
+        <ns2:creationId val="1024086991"/>
       </p:ext>
     </p:extLst>
   </p:cSld>
@@ -1151,7 +1138,7 @@
 </file>
 
 <file path=ppt/notesSlides/notesSlide19.xml><?xml version="1.0" encoding="utf-8"?>
-<p:notes xmlns:a="http://schemas.openxmlformats.org/drawingml/2006/main" xmlns:r="http://schemas.openxmlformats.org/officeDocument/2006/relationships" xmlns:p="http://schemas.openxmlformats.org/presentationml/2006/main">
+<p:notes xmlns:a="http://schemas.openxmlformats.org/drawingml/2006/main" xmlns:ns2="http://schemas.microsoft.com/office/powerpoint/2010/main" xmlns:p="http://schemas.openxmlformats.org/presentationml/2006/main">
   <p:cSld>
     <p:spTree>
       <p:nvGrpSpPr>
@@ -1194,7 +1181,7 @@
           <a:bodyPr/>
           <a:lstStyle/>
           <a:p>
-            <a:endParaRPr lang="en-US" dirty="0"/>
+            <a:endParaRPr dirty="0"/>
           </a:p>
         </p:txBody>
       </p:sp>
@@ -1224,7 +1211,7 @@
     </p:spTree>
     <p:extLst>
       <p:ext uri="{BB962C8B-B14F-4D97-AF65-F5344CB8AC3E}">
-        <p14:creationId xmlns:p14="http://schemas.microsoft.com/office/powerpoint/2010/main" val="1024086991"/>
+        <ns2:creationId val="1024086991"/>
       </p:ext>
     </p:extLst>
   </p:cSld>
@@ -1235,7 +1222,7 @@
 </file>
 
 <file path=ppt/notesSlides/notesSlide2.xml><?xml version="1.0" encoding="utf-8"?>
-<p:notes xmlns:a="http://schemas.openxmlformats.org/drawingml/2006/main" xmlns:r="http://schemas.openxmlformats.org/officeDocument/2006/relationships" xmlns:p="http://schemas.openxmlformats.org/presentationml/2006/main">
+<p:notes xmlns:a="http://schemas.openxmlformats.org/drawingml/2006/main" xmlns:ns2="http://schemas.microsoft.com/office/powerpoint/2010/main" xmlns:p="http://schemas.openxmlformats.org/presentationml/2006/main">
   <p:cSld>
     <p:spTree>
       <p:nvGrpSpPr>
@@ -1278,7 +1265,7 @@
           <a:bodyPr/>
           <a:lstStyle/>
           <a:p>
-            <a:endParaRPr lang="en-US" dirty="0"/>
+            <a:endParaRPr dirty="0"/>
           </a:p>
         </p:txBody>
       </p:sp>
@@ -1308,7 +1295,7 @@
     </p:spTree>
     <p:extLst>
       <p:ext uri="{BB962C8B-B14F-4D97-AF65-F5344CB8AC3E}">
-        <p14:creationId xmlns:p14="http://schemas.microsoft.com/office/powerpoint/2010/main" val="1024086991"/>
+        <ns2:creationId val="1024086991"/>
       </p:ext>
     </p:extLst>
   </p:cSld>
@@ -1319,7 +1306,7 @@
 </file>
 
 <file path=ppt/notesSlides/notesSlide20.xml><?xml version="1.0" encoding="utf-8"?>
-<p:notes xmlns:a="http://schemas.openxmlformats.org/drawingml/2006/main" xmlns:r="http://schemas.openxmlformats.org/officeDocument/2006/relationships" xmlns:p="http://schemas.openxmlformats.org/presentationml/2006/main">
+<p:notes xmlns:a="http://schemas.openxmlformats.org/drawingml/2006/main" xmlns:ns2="http://schemas.microsoft.com/office/powerpoint/2010/main" xmlns:p="http://schemas.openxmlformats.org/presentationml/2006/main">
   <p:cSld>
     <p:spTree>
       <p:nvGrpSpPr>
@@ -1362,7 +1349,7 @@
           <a:bodyPr/>
           <a:lstStyle/>
           <a:p>
-            <a:endParaRPr lang="en-US" dirty="0"/>
+            <a:endParaRPr dirty="0"/>
           </a:p>
         </p:txBody>
       </p:sp>
@@ -1392,7 +1379,7 @@
     </p:spTree>
     <p:extLst>
       <p:ext uri="{BB962C8B-B14F-4D97-AF65-F5344CB8AC3E}">
-        <p14:creationId xmlns:p14="http://schemas.microsoft.com/office/powerpoint/2010/main" val="1024086991"/>
+        <ns2:creationId val="1024086991"/>
       </p:ext>
     </p:extLst>
   </p:cSld>
@@ -1403,7 +1390,7 @@
 </file>
 
 <file path=ppt/notesSlides/notesSlide21.xml><?xml version="1.0" encoding="utf-8"?>
-<p:notes xmlns:a="http://schemas.openxmlformats.org/drawingml/2006/main" xmlns:r="http://schemas.openxmlformats.org/officeDocument/2006/relationships" xmlns:p="http://schemas.openxmlformats.org/presentationml/2006/main">
+<p:notes xmlns:a="http://schemas.openxmlformats.org/drawingml/2006/main" xmlns:ns2="http://schemas.microsoft.com/office/powerpoint/2010/main" xmlns:p="http://schemas.openxmlformats.org/presentationml/2006/main">
   <p:cSld>
     <p:spTree>
       <p:nvGrpSpPr>
@@ -1446,7 +1433,7 @@
           <a:bodyPr/>
           <a:lstStyle/>
           <a:p>
-            <a:endParaRPr lang="en-US" dirty="0"/>
+            <a:endParaRPr dirty="0"/>
           </a:p>
         </p:txBody>
       </p:sp>
@@ -1476,7 +1463,7 @@
     </p:spTree>
     <p:extLst>
       <p:ext uri="{BB962C8B-B14F-4D97-AF65-F5344CB8AC3E}">
-        <p14:creationId xmlns:p14="http://schemas.microsoft.com/office/powerpoint/2010/main" val="1024086991"/>
+        <ns2:creationId val="1024086991"/>
       </p:ext>
     </p:extLst>
   </p:cSld>
@@ -1487,7 +1474,7 @@
 </file>
 
 <file path=ppt/notesSlides/notesSlide22.xml><?xml version="1.0" encoding="utf-8"?>
-<p:notes xmlns:a="http://schemas.openxmlformats.org/drawingml/2006/main" xmlns:r="http://schemas.openxmlformats.org/officeDocument/2006/relationships" xmlns:p="http://schemas.openxmlformats.org/presentationml/2006/main">
+<p:notes xmlns:a="http://schemas.openxmlformats.org/drawingml/2006/main" xmlns:ns2="http://schemas.microsoft.com/office/powerpoint/2010/main" xmlns:p="http://schemas.openxmlformats.org/presentationml/2006/main">
   <p:cSld>
     <p:spTree>
       <p:nvGrpSpPr>
@@ -1530,7 +1517,7 @@
           <a:bodyPr/>
           <a:lstStyle/>
           <a:p>
-            <a:endParaRPr lang="en-US" dirty="0"/>
+            <a:endParaRPr dirty="0"/>
           </a:p>
         </p:txBody>
       </p:sp>
@@ -1560,7 +1547,7 @@
     </p:spTree>
     <p:extLst>
       <p:ext uri="{BB962C8B-B14F-4D97-AF65-F5344CB8AC3E}">
-        <p14:creationId xmlns:p14="http://schemas.microsoft.com/office/powerpoint/2010/main" val="1024086991"/>
+        <ns2:creationId val="1024086991"/>
       </p:ext>
     </p:extLst>
   </p:cSld>
@@ -1571,7 +1558,7 @@
 </file>
 
 <file path=ppt/notesSlides/notesSlide23.xml><?xml version="1.0" encoding="utf-8"?>
-<p:notes xmlns:a="http://schemas.openxmlformats.org/drawingml/2006/main" xmlns:r="http://schemas.openxmlformats.org/officeDocument/2006/relationships" xmlns:p="http://schemas.openxmlformats.org/presentationml/2006/main">
+<p:notes xmlns:a="http://schemas.openxmlformats.org/drawingml/2006/main" xmlns:ns2="http://schemas.microsoft.com/office/powerpoint/2010/main" xmlns:p="http://schemas.openxmlformats.org/presentationml/2006/main">
   <p:cSld>
     <p:spTree>
       <p:nvGrpSpPr>
@@ -1614,7 +1601,7 @@
           <a:bodyPr/>
           <a:lstStyle/>
           <a:p>
-            <a:endParaRPr lang="en-US" dirty="0"/>
+            <a:endParaRPr dirty="0"/>
           </a:p>
         </p:txBody>
       </p:sp>
@@ -1644,7 +1631,7 @@
     </p:spTree>
     <p:extLst>
       <p:ext uri="{BB962C8B-B14F-4D97-AF65-F5344CB8AC3E}">
-        <p14:creationId xmlns:p14="http://schemas.microsoft.com/office/powerpoint/2010/main" val="1024086991"/>
+        <ns2:creationId val="1024086991"/>
       </p:ext>
     </p:extLst>
   </p:cSld>
@@ -1655,7 +1642,7 @@
 </file>
 
 <file path=ppt/notesSlides/notesSlide24.xml><?xml version="1.0" encoding="utf-8"?>
-<p:notes xmlns:a="http://schemas.openxmlformats.org/drawingml/2006/main" xmlns:r="http://schemas.openxmlformats.org/officeDocument/2006/relationships" xmlns:p="http://schemas.openxmlformats.org/presentationml/2006/main">
+<p:notes xmlns:a="http://schemas.openxmlformats.org/drawingml/2006/main" xmlns:ns2="http://schemas.microsoft.com/office/powerpoint/2010/main" xmlns:p="http://schemas.openxmlformats.org/presentationml/2006/main">
   <p:cSld>
     <p:spTree>
       <p:nvGrpSpPr>
@@ -1698,7 +1685,7 @@
           <a:bodyPr/>
           <a:lstStyle/>
           <a:p>
-            <a:endParaRPr lang="en-US" dirty="0"/>
+            <a:endParaRPr dirty="0"/>
           </a:p>
         </p:txBody>
       </p:sp>
@@ -1788,7 +1775,7 @@
     </p:spTree>
     <p:extLst>
       <p:ext uri="{BB962C8B-B14F-4D97-AF65-F5344CB8AC3E}">
-        <p14:creationId xmlns:p14="http://schemas.microsoft.com/office/powerpoint/2010/main" val="1024086991"/>
+        <ns2:creationId val="1024086991"/>
       </p:ext>
     </p:extLst>
   </p:cSld>
@@ -1799,7 +1786,7 @@
 </file>
 
 <file path=ppt/notesSlides/notesSlide25.xml><?xml version="1.0" encoding="utf-8"?>
-<p:notes xmlns:a="http://schemas.openxmlformats.org/drawingml/2006/main" xmlns:r="http://schemas.openxmlformats.org/officeDocument/2006/relationships" xmlns:p="http://schemas.openxmlformats.org/presentationml/2006/main">
+<p:notes xmlns:a="http://schemas.openxmlformats.org/drawingml/2006/main" xmlns:ns2="http://schemas.microsoft.com/office/powerpoint/2010/main" xmlns:p="http://schemas.openxmlformats.org/presentationml/2006/main">
   <p:cSld>
     <p:spTree>
       <p:nvGrpSpPr>
@@ -1842,7 +1829,7 @@
           <a:bodyPr/>
           <a:lstStyle/>
           <a:p>
-            <a:endParaRPr lang="en-US" dirty="0"/>
+            <a:endParaRPr dirty="0"/>
           </a:p>
         </p:txBody>
       </p:sp>
@@ -1872,7 +1859,7 @@
     </p:spTree>
     <p:extLst>
       <p:ext uri="{BB962C8B-B14F-4D97-AF65-F5344CB8AC3E}">
-        <p14:creationId xmlns:p14="http://schemas.microsoft.com/office/powerpoint/2010/main" val="1024086991"/>
+        <ns2:creationId val="1024086991"/>
       </p:ext>
     </p:extLst>
   </p:cSld>
@@ -1883,7 +1870,7 @@
 </file>
 
 <file path=ppt/notesSlides/notesSlide26.xml><?xml version="1.0" encoding="utf-8"?>
-<p:notes xmlns:a="http://schemas.openxmlformats.org/drawingml/2006/main" xmlns:r="http://schemas.openxmlformats.org/officeDocument/2006/relationships" xmlns:p="http://schemas.openxmlformats.org/presentationml/2006/main">
+<p:notes xmlns:a="http://schemas.openxmlformats.org/drawingml/2006/main" xmlns:ns2="http://schemas.microsoft.com/office/powerpoint/2010/main" xmlns:p="http://schemas.openxmlformats.org/presentationml/2006/main">
   <p:cSld>
     <p:spTree>
       <p:nvGrpSpPr>
@@ -1926,7 +1913,7 @@
           <a:bodyPr/>
           <a:lstStyle/>
           <a:p>
-            <a:endParaRPr lang="en-US" dirty="0"/>
+            <a:endParaRPr dirty="0"/>
           </a:p>
         </p:txBody>
       </p:sp>
@@ -1956,7 +1943,7 @@
     </p:spTree>
     <p:extLst>
       <p:ext uri="{BB962C8B-B14F-4D97-AF65-F5344CB8AC3E}">
-        <p14:creationId xmlns:p14="http://schemas.microsoft.com/office/powerpoint/2010/main" val="1024086991"/>
+        <ns2:creationId val="1024086991"/>
       </p:ext>
     </p:extLst>
   </p:cSld>
@@ -1967,7 +1954,7 @@
 </file>
 
 <file path=ppt/notesSlides/notesSlide27.xml><?xml version="1.0" encoding="utf-8"?>
-<p:notes xmlns:a="http://schemas.openxmlformats.org/drawingml/2006/main" xmlns:r="http://schemas.openxmlformats.org/officeDocument/2006/relationships" xmlns:p="http://schemas.openxmlformats.org/presentationml/2006/main">
+<p:notes xmlns:a="http://schemas.openxmlformats.org/drawingml/2006/main" xmlns:ns2="http://schemas.microsoft.com/office/powerpoint/2010/main" xmlns:p="http://schemas.openxmlformats.org/presentationml/2006/main">
   <p:cSld>
     <p:spTree>
       <p:nvGrpSpPr>
@@ -2010,7 +1997,7 @@
           <a:bodyPr/>
           <a:lstStyle/>
           <a:p>
-            <a:endParaRPr lang="en-US" dirty="0"/>
+            <a:endParaRPr dirty="0"/>
           </a:p>
         </p:txBody>
       </p:sp>
@@ -2040,7 +2027,7 @@
     </p:spTree>
     <p:extLst>
       <p:ext uri="{BB962C8B-B14F-4D97-AF65-F5344CB8AC3E}">
-        <p14:creationId xmlns:p14="http://schemas.microsoft.com/office/powerpoint/2010/main" val="1024086991"/>
+        <ns2:creationId val="1024086991"/>
       </p:ext>
     </p:extLst>
   </p:cSld>
@@ -2051,7 +2038,7 @@
 </file>
 
 <file path=ppt/notesSlides/notesSlide28.xml><?xml version="1.0" encoding="utf-8"?>
-<p:notes xmlns:a="http://schemas.openxmlformats.org/drawingml/2006/main" xmlns:r="http://schemas.openxmlformats.org/officeDocument/2006/relationships" xmlns:p="http://schemas.openxmlformats.org/presentationml/2006/main">
+<p:notes xmlns:a="http://schemas.openxmlformats.org/drawingml/2006/main" xmlns:ns2="http://schemas.microsoft.com/office/powerpoint/2010/main" xmlns:p="http://schemas.openxmlformats.org/presentationml/2006/main">
   <p:cSld>
     <p:spTree>
       <p:nvGrpSpPr>
@@ -2094,7 +2081,7 @@
           <a:bodyPr/>
           <a:lstStyle/>
           <a:p>
-            <a:endParaRPr lang="en-US" dirty="0"/>
+            <a:endParaRPr dirty="0"/>
           </a:p>
         </p:txBody>
       </p:sp>
@@ -2124,7 +2111,7 @@
     </p:spTree>
     <p:extLst>
       <p:ext uri="{BB962C8B-B14F-4D97-AF65-F5344CB8AC3E}">
-        <p14:creationId xmlns:p14="http://schemas.microsoft.com/office/powerpoint/2010/main" val="1024086991"/>
+        <ns2:creationId val="1024086991"/>
       </p:ext>
     </p:extLst>
   </p:cSld>
@@ -2135,7 +2122,7 @@
 </file>
 
 <file path=ppt/notesSlides/notesSlide3.xml><?xml version="1.0" encoding="utf-8"?>
-<p:notes xmlns:a="http://schemas.openxmlformats.org/drawingml/2006/main" xmlns:r="http://schemas.openxmlformats.org/officeDocument/2006/relationships" xmlns:p="http://schemas.openxmlformats.org/presentationml/2006/main">
+<p:notes xmlns:a="http://schemas.openxmlformats.org/drawingml/2006/main" xmlns:ns2="http://schemas.microsoft.com/office/powerpoint/2010/main" xmlns:p="http://schemas.openxmlformats.org/presentationml/2006/main">
   <p:cSld>
     <p:spTree>
       <p:nvGrpSpPr>
@@ -2178,7 +2165,7 @@
           <a:bodyPr/>
           <a:lstStyle/>
           <a:p>
-            <a:endParaRPr lang="en-US" dirty="0"/>
+            <a:endParaRPr dirty="0"/>
           </a:p>
         </p:txBody>
       </p:sp>
@@ -2208,7 +2195,7 @@
     </p:spTree>
     <p:extLst>
       <p:ext uri="{BB962C8B-B14F-4D97-AF65-F5344CB8AC3E}">
-        <p14:creationId xmlns:p14="http://schemas.microsoft.com/office/powerpoint/2010/main" val="1024086991"/>
+        <ns2:creationId val="1024086991"/>
       </p:ext>
     </p:extLst>
   </p:cSld>
@@ -2219,7 +2206,7 @@
 </file>
 
 <file path=ppt/notesSlides/notesSlide4.xml><?xml version="1.0" encoding="utf-8"?>
-<p:notes xmlns:a="http://schemas.openxmlformats.org/drawingml/2006/main" xmlns:r="http://schemas.openxmlformats.org/officeDocument/2006/relationships" xmlns:p="http://schemas.openxmlformats.org/presentationml/2006/main">
+<p:notes xmlns:a="http://schemas.openxmlformats.org/drawingml/2006/main" xmlns:ns2="http://schemas.microsoft.com/office/powerpoint/2010/main" xmlns:p="http://schemas.openxmlformats.org/presentationml/2006/main">
   <p:cSld>
     <p:spTree>
       <p:nvGrpSpPr>
@@ -2262,7 +2249,7 @@
           <a:bodyPr/>
           <a:lstStyle/>
           <a:p>
-            <a:endParaRPr lang="en-US" dirty="0"/>
+            <a:endParaRPr dirty="0"/>
           </a:p>
         </p:txBody>
       </p:sp>
@@ -2292,7 +2279,7 @@
     </p:spTree>
     <p:extLst>
       <p:ext uri="{BB962C8B-B14F-4D97-AF65-F5344CB8AC3E}">
-        <p14:creationId xmlns:p14="http://schemas.microsoft.com/office/powerpoint/2010/main" val="1024086991"/>
+        <ns2:creationId val="1024086991"/>
       </p:ext>
     </p:extLst>
   </p:cSld>
@@ -2303,7 +2290,7 @@
 </file>
 
 <file path=ppt/notesSlides/notesSlide5.xml><?xml version="1.0" encoding="utf-8"?>
-<p:notes xmlns:a="http://schemas.openxmlformats.org/drawingml/2006/main" xmlns:r="http://schemas.openxmlformats.org/officeDocument/2006/relationships" xmlns:p="http://schemas.openxmlformats.org/presentationml/2006/main">
+<p:notes xmlns:a="http://schemas.openxmlformats.org/drawingml/2006/main" xmlns:ns2="http://schemas.microsoft.com/office/powerpoint/2010/main" xmlns:p="http://schemas.openxmlformats.org/presentationml/2006/main">
   <p:cSld>
     <p:spTree>
       <p:nvGrpSpPr>
@@ -2346,7 +2333,7 @@
           <a:bodyPr/>
           <a:lstStyle/>
           <a:p>
-            <a:endParaRPr lang="en-US" dirty="0"/>
+            <a:endParaRPr dirty="0"/>
           </a:p>
         </p:txBody>
       </p:sp>
@@ -2376,7 +2363,7 @@
     </p:spTree>
     <p:extLst>
       <p:ext uri="{BB962C8B-B14F-4D97-AF65-F5344CB8AC3E}">
-        <p14:creationId xmlns:p14="http://schemas.microsoft.com/office/powerpoint/2010/main" val="1024086991"/>
+        <ns2:creationId val="1024086991"/>
       </p:ext>
     </p:extLst>
   </p:cSld>
@@ -2387,7 +2374,7 @@
 </file>
 
 <file path=ppt/notesSlides/notesSlide6.xml><?xml version="1.0" encoding="utf-8"?>
-<p:notes xmlns:a="http://schemas.openxmlformats.org/drawingml/2006/main" xmlns:r="http://schemas.openxmlformats.org/officeDocument/2006/relationships" xmlns:p="http://schemas.openxmlformats.org/presentationml/2006/main">
+<p:notes xmlns:a="http://schemas.openxmlformats.org/drawingml/2006/main" xmlns:ns2="http://schemas.microsoft.com/office/powerpoint/2010/main" xmlns:p="http://schemas.openxmlformats.org/presentationml/2006/main">
   <p:cSld>
     <p:spTree>
       <p:nvGrpSpPr>
@@ -2430,7 +2417,7 @@
           <a:bodyPr/>
           <a:lstStyle/>
           <a:p>
-            <a:endParaRPr lang="en-US" dirty="0"/>
+            <a:endParaRPr dirty="0"/>
           </a:p>
         </p:txBody>
       </p:sp>
@@ -2460,7 +2447,7 @@
     </p:spTree>
     <p:extLst>
       <p:ext uri="{BB962C8B-B14F-4D97-AF65-F5344CB8AC3E}">
-        <p14:creationId xmlns:p14="http://schemas.microsoft.com/office/powerpoint/2010/main" val="1024086991"/>
+        <ns2:creationId val="1024086991"/>
       </p:ext>
     </p:extLst>
   </p:cSld>
@@ -2471,7 +2458,7 @@
 </file>
 
 <file path=ppt/notesSlides/notesSlide7.xml><?xml version="1.0" encoding="utf-8"?>
-<p:notes xmlns:a="http://schemas.openxmlformats.org/drawingml/2006/main" xmlns:r="http://schemas.openxmlformats.org/officeDocument/2006/relationships" xmlns:p="http://schemas.openxmlformats.org/presentationml/2006/main">
+<p:notes xmlns:a="http://schemas.openxmlformats.org/drawingml/2006/main" xmlns:ns2="http://schemas.microsoft.com/office/powerpoint/2010/main" xmlns:p="http://schemas.openxmlformats.org/presentationml/2006/main">
   <p:cSld>
     <p:spTree>
       <p:nvGrpSpPr>
@@ -2514,7 +2501,7 @@
           <a:bodyPr/>
           <a:lstStyle/>
           <a:p>
-            <a:endParaRPr lang="en-US" dirty="0"/>
+            <a:endParaRPr dirty="0"/>
           </a:p>
         </p:txBody>
       </p:sp>
@@ -2544,7 +2531,7 @@
     </p:spTree>
     <p:extLst>
       <p:ext uri="{BB962C8B-B14F-4D97-AF65-F5344CB8AC3E}">
-        <p14:creationId xmlns:p14="http://schemas.microsoft.com/office/powerpoint/2010/main" val="1024086991"/>
+        <ns2:creationId val="1024086991"/>
       </p:ext>
     </p:extLst>
   </p:cSld>
@@ -2555,7 +2542,7 @@
 </file>
 
 <file path=ppt/notesSlides/notesSlide8.xml><?xml version="1.0" encoding="utf-8"?>
-<p:notes xmlns:a="http://schemas.openxmlformats.org/drawingml/2006/main" xmlns:r="http://schemas.openxmlformats.org/officeDocument/2006/relationships" xmlns:p="http://schemas.openxmlformats.org/presentationml/2006/main">
+<p:notes xmlns:a="http://schemas.openxmlformats.org/drawingml/2006/main" xmlns:ns2="http://schemas.microsoft.com/office/powerpoint/2010/main" xmlns:p="http://schemas.openxmlformats.org/presentationml/2006/main">
   <p:cSld>
     <p:spTree>
       <p:nvGrpSpPr>
@@ -2598,7 +2585,7 @@
           <a:bodyPr/>
           <a:lstStyle/>
           <a:p>
-            <a:endParaRPr lang="en-US" dirty="0"/>
+            <a:endParaRPr dirty="0"/>
           </a:p>
         </p:txBody>
       </p:sp>
@@ -2628,7 +2615,7 @@
     </p:spTree>
     <p:extLst>
       <p:ext uri="{BB962C8B-B14F-4D97-AF65-F5344CB8AC3E}">
-        <p14:creationId xmlns:p14="http://schemas.microsoft.com/office/powerpoint/2010/main" val="1024086991"/>
+        <ns2:creationId val="1024086991"/>
       </p:ext>
     </p:extLst>
   </p:cSld>
@@ -2639,7 +2626,7 @@
 </file>
 
 <file path=ppt/notesSlides/notesSlide9.xml><?xml version="1.0" encoding="utf-8"?>
-<p:notes xmlns:a="http://schemas.openxmlformats.org/drawingml/2006/main" xmlns:r="http://schemas.openxmlformats.org/officeDocument/2006/relationships" xmlns:p="http://schemas.openxmlformats.org/presentationml/2006/main">
+<p:notes xmlns:a="http://schemas.openxmlformats.org/drawingml/2006/main" xmlns:ns2="http://schemas.microsoft.com/office/powerpoint/2010/main" xmlns:p="http://schemas.openxmlformats.org/presentationml/2006/main">
   <p:cSld>
     <p:spTree>
       <p:nvGrpSpPr>
@@ -2682,7 +2669,7 @@
           <a:bodyPr/>
           <a:lstStyle/>
           <a:p>
-            <a:endParaRPr lang="en-US" dirty="0"/>
+            <a:endParaRPr dirty="0"/>
           </a:p>
         </p:txBody>
       </p:sp>
@@ -2712,7 +2699,7 @@
     </p:spTree>
     <p:extLst>
       <p:ext uri="{BB962C8B-B14F-4D97-AF65-F5344CB8AC3E}">
-        <p14:creationId xmlns:p14="http://schemas.microsoft.com/office/powerpoint/2010/main" val="1024086991"/>
+        <ns2:creationId val="1024086991"/>
       </p:ext>
     </p:extLst>
   </p:cSld>
